--- a/src/runtime/office/design/library/templates/mixdog-executive.pptx
+++ b/src/runtime/office/design/library/templates/mixdog-executive.pptx
@@ -13507,7 +13507,7 @@
             <a:r>
               <a:rPr lang="en-US" altLang="ko-KR" sz="1100" b="1">
                 <a:solidFill>
-                  <a:srgbClr val="D8583F"/>
+                  <a:srgbClr val="DC5F46"/>
                 </a:solidFill>
                 <a:latin typeface="Arial" panose="020B0604020202020204" pitchFamily="34" charset="0"/>
               </a:rPr>
@@ -13515,7 +13515,7 @@
             </a:r>
             <a:endParaRPr lang="ko-KR" altLang="en-US" sz="1100" b="1">
               <a:solidFill>
-                <a:srgbClr val="D8583F"/>
+                <a:srgbClr val="DC5F46"/>
               </a:solidFill>
               <a:latin typeface="Arial" panose="020B0604020202020204" pitchFamily="34" charset="0"/>
             </a:endParaRPr>
@@ -16763,7 +16763,7 @@
             <a:r>
               <a:rPr lang="en-US" altLang="ko-KR" sz="1000" b="1">
                 <a:solidFill>
-                  <a:srgbClr val="D8583F"/>
+                  <a:srgbClr val="DC5F46"/>
                 </a:solidFill>
                 <a:latin typeface="Arial" panose="020B0604020202020204" pitchFamily="34" charset="0"/>
               </a:rPr>
@@ -16771,7 +16771,7 @@
             </a:r>
             <a:endParaRPr lang="ko-KR" altLang="en-US" sz="1000" b="1">
               <a:solidFill>
-                <a:srgbClr val="D8583F"/>
+                <a:srgbClr val="DC5F46"/>
               </a:solidFill>
               <a:latin typeface="Arial" panose="020B0604020202020204" pitchFamily="34" charset="0"/>
             </a:endParaRPr>
@@ -18631,7 +18631,7 @@
             <a:r>
               <a:rPr lang="en-US" altLang="ko-KR" sz="1000" b="1">
                 <a:solidFill>
-                  <a:srgbClr val="D8583F"/>
+                  <a:srgbClr val="DC5F46"/>
                 </a:solidFill>
                 <a:latin typeface="Arial" panose="020B0604020202020204" pitchFamily="34" charset="0"/>
               </a:rPr>
@@ -18639,7 +18639,7 @@
             </a:r>
             <a:endParaRPr lang="ko-KR" altLang="en-US" sz="1000" b="1">
               <a:solidFill>
-                <a:srgbClr val="D8583F"/>
+                <a:srgbClr val="DC5F46"/>
               </a:solidFill>
               <a:latin typeface="Arial" panose="020B0604020202020204" pitchFamily="34" charset="0"/>
             </a:endParaRPr>
@@ -18770,7 +18770,7 @@
             <a:r>
               <a:rPr lang="en-US" altLang="ko-KR" sz="8200" b="1">
                 <a:solidFill>
-                  <a:srgbClr val="D8583F"/>
+                  <a:srgbClr val="DC5F46"/>
                 </a:solidFill>
                 <a:latin typeface="Georgia" panose="02040502050405020303" pitchFamily="18" charset="0"/>
               </a:rPr>
@@ -18778,7 +18778,7 @@
             </a:r>
             <a:endParaRPr lang="ko-KR" altLang="en-US" sz="8200" b="1">
               <a:solidFill>
-                <a:srgbClr val="D8583F"/>
+                <a:srgbClr val="DC5F46"/>
               </a:solidFill>
               <a:latin typeface="Georgia" panose="02040502050405020303" pitchFamily="18" charset="0"/>
             </a:endParaRPr>

--- a/src/runtime/office/design/library/templates/mixdog-executive.pptx
+++ b/src/runtime/office/design/library/templates/mixdog-executive.pptx
@@ -13556,6 +13556,7 @@
                   <a:srgbClr val="F7F8FA"/>
                 </a:solidFill>
                 <a:latin typeface="Georgia" panose="02040502050405020303" pitchFamily="18" charset="0"/>
+                <a:ea typeface="Batang"/>
               </a:rPr>
               <a:t>From blank canvas to boardroom-ready</a:t>
             </a:r>
@@ -13564,6 +13565,7 @@
                 <a:srgbClr val="F7F8FA"/>
               </a:solidFill>
               <a:latin typeface="Georgia" panose="02040502050405020303" pitchFamily="18" charset="0"/>
+              <a:ea typeface="Batang"/>
             </a:endParaRPr>
           </a:p>
         </p:txBody>
@@ -13702,6 +13704,7 @@
                   <a:srgbClr val="FFFFFF"/>
                 </a:solidFill>
                 <a:latin typeface="Georgia" panose="02040502050405020303" pitchFamily="18" charset="0"/>
+                <a:ea typeface="Batang"/>
               </a:rPr>
               <a:t>18</a:t>
             </a:r>
@@ -13710,6 +13713,7 @@
                 <a:srgbClr val="FFFFFF"/>
               </a:solidFill>
               <a:latin typeface="Georgia" panose="02040502050405020303" pitchFamily="18" charset="0"/>
+              <a:ea typeface="Batang"/>
             </a:endParaRPr>
           </a:p>
         </p:txBody>
@@ -13832,6 +13836,7 @@
                   <a:srgbClr val="171A1F"/>
                 </a:solidFill>
                 <a:latin typeface="Georgia" panose="02040502050405020303" pitchFamily="18" charset="0"/>
+                <a:ea typeface="Batang"/>
               </a:rPr>
               <a:t>Evidence should survive the meeting.</a:t>
             </a:r>
@@ -13840,6 +13845,7 @@
                 <a:srgbClr val="171A1F"/>
               </a:solidFill>
               <a:latin typeface="Georgia" panose="02040502050405020303" pitchFamily="18" charset="0"/>
+              <a:ea typeface="Batang"/>
             </a:endParaRPr>
           </a:p>
         </p:txBody>
@@ -14320,6 +14326,7 @@
                   <a:srgbClr val="171A1F"/>
                 </a:solidFill>
                 <a:latin typeface="Georgia" panose="02040502050405020303" pitchFamily="18" charset="0"/>
+                <a:ea typeface="Batang"/>
               </a:rPr>
               <a:t>Use the right image, not another rectangle.</a:t>
             </a:r>
@@ -14328,6 +14335,7 @@
                 <a:srgbClr val="171A1F"/>
               </a:solidFill>
               <a:latin typeface="Georgia" panose="02040502050405020303" pitchFamily="18" charset="0"/>
+              <a:ea typeface="Batang"/>
             </a:endParaRPr>
           </a:p>
         </p:txBody>
@@ -14533,6 +14541,7 @@
                   <a:srgbClr val="171A1F"/>
                 </a:solidFill>
                 <a:latin typeface="Georgia" panose="02040502050405020303" pitchFamily="18" charset="0"/>
+                <a:ea typeface="Batang"/>
               </a:rPr>
               <a:t>A repeatable operating model for every high-stakes deck.</a:t>
             </a:r>
@@ -14541,6 +14550,7 @@
                 <a:srgbClr val="171A1F"/>
               </a:solidFill>
               <a:latin typeface="Georgia" panose="02040502050405020303" pitchFamily="18" charset="0"/>
+              <a:ea typeface="Batang"/>
             </a:endParaRPr>
           </a:p>
         </p:txBody>
@@ -15201,6 +15211,7 @@
                   <a:srgbClr val="171A1F"/>
                 </a:solidFill>
                 <a:latin typeface="Georgia" panose="02040502050405020303" pitchFamily="18" charset="0"/>
+                <a:ea typeface="Batang"/>
               </a:rPr>
               <a:t>From generic output to a designed argument.</a:t>
             </a:r>
@@ -15209,6 +15220,7 @@
                 <a:srgbClr val="171A1F"/>
               </a:solidFill>
               <a:latin typeface="Georgia" panose="02040502050405020303" pitchFamily="18" charset="0"/>
+              <a:ea typeface="Batang"/>
             </a:endParaRPr>
           </a:p>
         </p:txBody>
@@ -15247,6 +15259,7 @@
                   <a:srgbClr val="646B73"/>
                 </a:solidFill>
                 <a:latin typeface="Georgia" panose="02040502050405020303" pitchFamily="18" charset="0"/>
+                <a:ea typeface="Batang"/>
               </a:rPr>
               <a:t>Generic</a:t>
             </a:r>
@@ -15255,6 +15268,7 @@
                 <a:srgbClr val="646B73"/>
               </a:solidFill>
               <a:latin typeface="Georgia" panose="02040502050405020303" pitchFamily="18" charset="0"/>
+              <a:ea typeface="Batang"/>
             </a:endParaRPr>
           </a:p>
         </p:txBody>
@@ -15393,6 +15407,7 @@
                   <a:srgbClr val="171A1F"/>
                 </a:solidFill>
                 <a:latin typeface="Georgia" panose="02040502050405020303" pitchFamily="18" charset="0"/>
+                <a:ea typeface="Batang"/>
               </a:rPr>
               <a:t>Directed</a:t>
             </a:r>
@@ -15401,6 +15416,7 @@
                 <a:srgbClr val="171A1F"/>
               </a:solidFill>
               <a:latin typeface="Georgia" panose="02040502050405020303" pitchFamily="18" charset="0"/>
+              <a:ea typeface="Batang"/>
             </a:endParaRPr>
           </a:p>
         </p:txBody>
@@ -15566,9 +15582,10 @@
             <a:r>
               <a:rPr lang="ko-KR" altLang="en-US" sz="7800" b="1">
                 <a:solidFill>
-                  <a:srgbClr val="D8583F"/>
+                  <a:srgbClr val="EA7A60"/>
                 </a:solidFill>
                 <a:latin typeface="Georgia" panose="02040502050405020303" pitchFamily="18" charset="0"/>
+                <a:ea typeface="Batang"/>
               </a:rPr>
               <a:t>“</a:t>
             </a:r>
@@ -15609,6 +15626,7 @@
                   <a:srgbClr val="FFFFFF"/>
                 </a:solidFill>
                 <a:latin typeface="Georgia" panose="02040502050405020303" pitchFamily="18" charset="0"/>
+                <a:ea typeface="Batang"/>
               </a:rPr>
               <a:t>Design is not decoration. It is decision infrastructure.</a:t>
             </a:r>
@@ -15617,6 +15635,7 @@
                 <a:srgbClr val="FFFFFF"/>
               </a:solidFill>
               <a:latin typeface="Georgia" panose="02040502050405020303" pitchFamily="18" charset="0"/>
+              <a:ea typeface="Batang"/>
             </a:endParaRPr>
           </a:p>
         </p:txBody>
@@ -15831,6 +15850,7 @@
                   <a:srgbClr val="171A1F"/>
                 </a:solidFill>
                 <a:latin typeface="Georgia" panose="02040502050405020303" pitchFamily="18" charset="0"/>
+                <a:ea typeface="Batang"/>
               </a:rPr>
               <a:t>Native templates create leverage only when selection is semantic.</a:t>
             </a:r>
@@ -15839,6 +15859,7 @@
                 <a:srgbClr val="171A1F"/>
               </a:solidFill>
               <a:latin typeface="Georgia" panose="02040502050405020303" pitchFamily="18" charset="0"/>
+              <a:ea typeface="Batang"/>
             </a:endParaRPr>
           </a:p>
         </p:txBody>
@@ -15977,6 +15998,7 @@
                   <a:srgbClr val="254E70"/>
                 </a:solidFill>
                 <a:latin typeface="Georgia" panose="02040502050405020303" pitchFamily="18" charset="0"/>
+                <a:ea typeface="Batang"/>
               </a:rPr>
               <a:t>FORM FOLLOWS FUNCTION</a:t>
             </a:r>
@@ -15985,6 +16007,7 @@
                 <a:srgbClr val="254E70"/>
               </a:solidFill>
               <a:latin typeface="Georgia" panose="02040502050405020303" pitchFamily="18" charset="0"/>
+              <a:ea typeface="Batang"/>
             </a:endParaRPr>
           </a:p>
         </p:txBody>
@@ -16020,7 +16043,7 @@
             <a:r>
               <a:rPr lang="en-US" altLang="ko-KR" sz="900">
                 <a:solidFill>
-                  <a:srgbClr val="7C838B"/>
+                  <a:srgbClr val="6B7280"/>
                 </a:solidFill>
                 <a:latin typeface="Arial" panose="020B0604020202020204" pitchFamily="34" charset="0"/>
               </a:rPr>
@@ -16028,7 +16051,7 @@
             </a:r>
             <a:endParaRPr lang="ko-KR" altLang="en-US" sz="900">
               <a:solidFill>
-                <a:srgbClr val="7C838B"/>
+                <a:srgbClr val="6B7280"/>
               </a:solidFill>
               <a:latin typeface="Arial" panose="020B0604020202020204" pitchFamily="34" charset="0"/>
             </a:endParaRPr>
@@ -16107,6 +16130,7 @@
                   <a:srgbClr val="171A1F"/>
                 </a:solidFill>
                 <a:latin typeface="Georgia" panose="02040502050405020303" pitchFamily="18" charset="0"/>
+                <a:ea typeface="Batang"/>
               </a:rPr>
               <a:t>Measured improvement, visible in one glance.</a:t>
             </a:r>
@@ -16115,6 +16139,7 @@
                 <a:srgbClr val="171A1F"/>
               </a:solidFill>
               <a:latin typeface="Georgia" panose="02040502050405020303" pitchFamily="18" charset="0"/>
+              <a:ea typeface="Batang"/>
             </a:endParaRPr>
           </a:p>
         </p:txBody>
@@ -16154,6 +16179,7 @@
                   <a:srgbClr val="C7422F"/>
                 </a:solidFill>
                 <a:latin typeface="Georgia" panose="02040502050405020303" pitchFamily="18" charset="0"/>
+                <a:ea typeface="Batang"/>
               </a:rPr>
               <a:t>−25%</a:t>
             </a:r>
@@ -16162,6 +16188,7 @@
                 <a:srgbClr val="C7422F"/>
               </a:solidFill>
               <a:latin typeface="Georgia" panose="02040502050405020303" pitchFamily="18" charset="0"/>
+              <a:ea typeface="Batang"/>
             </a:endParaRPr>
           </a:p>
         </p:txBody>
@@ -16406,6 +16433,7 @@
                   <a:srgbClr val="171A1F"/>
                 </a:solidFill>
                 <a:latin typeface="Georgia" panose="02040502050405020303" pitchFamily="18" charset="0"/>
+                <a:ea typeface="Batang"/>
               </a:rPr>
               <a:t>Every deliverable passes three independent proofs.</a:t>
             </a:r>
@@ -16414,6 +16442,7 @@
                 <a:srgbClr val="171A1F"/>
               </a:solidFill>
               <a:latin typeface="Georgia" panose="02040502050405020303" pitchFamily="18" charset="0"/>
+              <a:ea typeface="Batang"/>
             </a:endParaRPr>
           </a:p>
         </p:txBody>
@@ -16452,6 +16481,7 @@
                   <a:srgbClr val="171A1F"/>
                 </a:solidFill>
                 <a:latin typeface="Georgia" panose="02040502050405020303" pitchFamily="18" charset="0"/>
+                <a:ea typeface="Batang"/>
               </a:rPr>
               <a:t>Structure</a:t>
             </a:r>
@@ -16460,6 +16490,7 @@
                 <a:srgbClr val="171A1F"/>
               </a:solidFill>
               <a:latin typeface="Georgia" panose="02040502050405020303" pitchFamily="18" charset="0"/>
+              <a:ea typeface="Batang"/>
             </a:endParaRPr>
           </a:p>
         </p:txBody>
@@ -16544,6 +16575,7 @@
                   <a:srgbClr val="254E70"/>
                 </a:solidFill>
                 <a:latin typeface="Georgia" panose="02040502050405020303" pitchFamily="18" charset="0"/>
+                <a:ea typeface="Batang"/>
               </a:rPr>
               <a:t>Visual</a:t>
             </a:r>
@@ -16552,6 +16584,7 @@
                 <a:srgbClr val="254E70"/>
               </a:solidFill>
               <a:latin typeface="Georgia" panose="02040502050405020303" pitchFamily="18" charset="0"/>
+              <a:ea typeface="Batang"/>
             </a:endParaRPr>
           </a:p>
         </p:txBody>
@@ -16636,6 +16669,7 @@
                   <a:srgbClr val="C7422F"/>
                 </a:solidFill>
                 <a:latin typeface="Georgia" panose="02040502050405020303" pitchFamily="18" charset="0"/>
+                <a:ea typeface="Batang"/>
               </a:rPr>
               <a:t>Package</a:t>
             </a:r>
@@ -16644,6 +16678,7 @@
                 <a:srgbClr val="C7422F"/>
               </a:solidFill>
               <a:latin typeface="Georgia" panose="02040502050405020303" pitchFamily="18" charset="0"/>
+              <a:ea typeface="Batang"/>
             </a:endParaRPr>
           </a:p>
         </p:txBody>
@@ -16812,6 +16847,7 @@
                   <a:srgbClr val="FFFFFF"/>
                 </a:solidFill>
                 <a:latin typeface="Georgia" panose="02040502050405020303" pitchFamily="18" charset="0"/>
+                <a:ea typeface="Batang"/>
               </a:rPr>
               <a:t>Build once. Present with confidence.</a:t>
             </a:r>
@@ -16820,6 +16856,7 @@
                 <a:srgbClr val="FFFFFF"/>
               </a:solidFill>
               <a:latin typeface="Georgia" panose="02040502050405020303" pitchFamily="18" charset="0"/>
+              <a:ea typeface="Batang"/>
             </a:endParaRPr>
           </a:p>
         </p:txBody>
@@ -16959,6 +16996,7 @@
                   <a:srgbClr val="FFFFFF"/>
                 </a:solidFill>
                 <a:latin typeface="Georgia" panose="02040502050405020303" pitchFamily="18" charset="0"/>
+                <a:ea typeface="Batang"/>
               </a:rPr>
               <a:t>MIXDOG</a:t>
             </a:r>
@@ -16967,6 +17005,7 @@
                 <a:srgbClr val="FFFFFF"/>
               </a:solidFill>
               <a:latin typeface="Georgia" panose="02040502050405020303" pitchFamily="18" charset="0"/>
+              <a:ea typeface="Batang"/>
             </a:endParaRPr>
           </a:p>
         </p:txBody>
@@ -17089,7 +17128,7 @@
                   <a:srgbClr val="171A1F"/>
                 </a:solidFill>
                 <a:latin typeface="Georgia"/>
-                <a:ea typeface="Georgia"/>
+                <a:ea typeface="Batang"/>
                 <a:cs typeface="Georgia"/>
               </a:rPr>
               <a:t>Comparison at a glance</a:t>
@@ -17128,7 +17167,7 @@
             <a:r>
               <a:rPr lang="en-US" sz="1300" dirty="0">
                 <a:solidFill>
-                  <a:srgbClr val="7C838B"/>
+                  <a:srgbClr val="6B7280"/>
                 </a:solidFill>
                 <a:latin typeface="Arial"/>
                 <a:ea typeface="Arial"/>
@@ -17722,6 +17761,7 @@
                   <a:srgbClr val="171A1F"/>
                 </a:solidFill>
                 <a:latin typeface="Georgia" panose="02040502050405020303" pitchFamily="18" charset="0"/>
+                <a:ea typeface="Batang"/>
               </a:rPr>
               <a:t>One brief. Three disciplined passes.</a:t>
             </a:r>
@@ -17730,6 +17770,7 @@
                 <a:srgbClr val="171A1F"/>
               </a:solidFill>
               <a:latin typeface="Georgia" panose="02040502050405020303" pitchFamily="18" charset="0"/>
+              <a:ea typeface="Batang"/>
             </a:endParaRPr>
           </a:p>
         </p:txBody>
@@ -17768,6 +17809,7 @@
                   <a:srgbClr val="C7422F"/>
                 </a:solidFill>
                 <a:latin typeface="Georgia" panose="02040502050405020303" pitchFamily="18" charset="0"/>
+                <a:ea typeface="Batang"/>
               </a:rPr>
               <a:t>01</a:t>
             </a:r>
@@ -17776,6 +17818,7 @@
                 <a:srgbClr val="C7422F"/>
               </a:solidFill>
               <a:latin typeface="Georgia" panose="02040502050405020303" pitchFamily="18" charset="0"/>
+              <a:ea typeface="Batang"/>
             </a:endParaRPr>
           </a:p>
         </p:txBody>
@@ -17860,6 +17903,7 @@
                   <a:srgbClr val="254E70"/>
                 </a:solidFill>
                 <a:latin typeface="Georgia" panose="02040502050405020303" pitchFamily="18" charset="0"/>
+                <a:ea typeface="Batang"/>
               </a:rPr>
               <a:t>02</a:t>
             </a:r>
@@ -17868,6 +17912,7 @@
                 <a:srgbClr val="254E70"/>
               </a:solidFill>
               <a:latin typeface="Georgia" panose="02040502050405020303" pitchFamily="18" charset="0"/>
+              <a:ea typeface="Batang"/>
             </a:endParaRPr>
           </a:p>
         </p:txBody>
@@ -17952,6 +17997,7 @@
                   <a:srgbClr val="6B7D6A"/>
                 </a:solidFill>
                 <a:latin typeface="Georgia" panose="02040502050405020303" pitchFamily="18" charset="0"/>
+                <a:ea typeface="Batang"/>
               </a:rPr>
               <a:t>03</a:t>
             </a:r>
@@ -17960,6 +18006,7 @@
                 <a:srgbClr val="6B7D6A"/>
               </a:solidFill>
               <a:latin typeface="Georgia" panose="02040502050405020303" pitchFamily="18" charset="0"/>
+              <a:ea typeface="Batang"/>
             </a:endParaRPr>
           </a:p>
         </p:txBody>
@@ -18174,6 +18221,7 @@
                   <a:srgbClr val="171A1F"/>
                 </a:solidFill>
                 <a:latin typeface="Georgia" panose="02040502050405020303" pitchFamily="18" charset="0"/>
+                <a:ea typeface="Batang"/>
               </a:rPr>
               <a:t>Less orchestration. More finished work.</a:t>
             </a:r>
@@ -18182,6 +18230,7 @@
                 <a:srgbClr val="171A1F"/>
               </a:solidFill>
               <a:latin typeface="Georgia" panose="02040502050405020303" pitchFamily="18" charset="0"/>
+              <a:ea typeface="Batang"/>
             </a:endParaRPr>
           </a:p>
         </p:txBody>
@@ -18274,6 +18323,7 @@
                   <a:srgbClr val="FFFFFF"/>
                 </a:solidFill>
                 <a:latin typeface="Georgia" panose="02040502050405020303" pitchFamily="18" charset="0"/>
+                <a:ea typeface="Batang"/>
               </a:rPr>
               <a:t>1 call</a:t>
             </a:r>
@@ -18282,6 +18332,7 @@
                 <a:srgbClr val="FFFFFF"/>
               </a:solidFill>
               <a:latin typeface="Georgia" panose="02040502050405020303" pitchFamily="18" charset="0"/>
+              <a:ea typeface="Batang"/>
             </a:endParaRPr>
           </a:p>
         </p:txBody>
@@ -18412,6 +18463,7 @@
                   <a:srgbClr val="254E70"/>
                 </a:solidFill>
                 <a:latin typeface="Georgia" panose="02040502050405020303" pitchFamily="18" charset="0"/>
+                <a:ea typeface="Batang"/>
               </a:rPr>
               <a:t>−86%</a:t>
             </a:r>
@@ -18420,6 +18472,7 @@
                 <a:srgbClr val="254E70"/>
               </a:solidFill>
               <a:latin typeface="Georgia" panose="02040502050405020303" pitchFamily="18" charset="0"/>
+              <a:ea typeface="Batang"/>
             </a:endParaRPr>
           </a:p>
         </p:txBody>
@@ -18504,6 +18557,7 @@
                   <a:srgbClr val="6B7D6A"/>
                 </a:solidFill>
                 <a:latin typeface="Georgia" panose="02040502050405020303" pitchFamily="18" charset="0"/>
+                <a:ea typeface="Batang"/>
               </a:rPr>
               <a:t>100%</a:t>
             </a:r>
@@ -18512,6 +18566,7 @@
                 <a:srgbClr val="6B7D6A"/>
               </a:solidFill>
               <a:latin typeface="Georgia" panose="02040502050405020303" pitchFamily="18" charset="0"/>
+              <a:ea typeface="Batang"/>
             </a:endParaRPr>
           </a:p>
         </p:txBody>
@@ -18680,6 +18735,7 @@
                   <a:srgbClr val="F7F8FA"/>
                 </a:solidFill>
                 <a:latin typeface="Georgia" panose="02040502050405020303" pitchFamily="18" charset="0"/>
+                <a:ea typeface="Batang"/>
               </a:rPr>
               <a:t>The result stays editable where teams already work.</a:t>
             </a:r>
@@ -18688,6 +18744,7 @@
                 <a:srgbClr val="F7F8FA"/>
               </a:solidFill>
               <a:latin typeface="Georgia" panose="02040502050405020303" pitchFamily="18" charset="0"/>
+              <a:ea typeface="Batang"/>
             </a:endParaRPr>
           </a:p>
         </p:txBody>
@@ -18773,6 +18830,7 @@
                   <a:srgbClr val="DC5F46"/>
                 </a:solidFill>
                 <a:latin typeface="Georgia" panose="02040502050405020303" pitchFamily="18" charset="0"/>
+                <a:ea typeface="Batang"/>
               </a:rPr>
               <a:t>18</a:t>
             </a:r>
@@ -18781,6 +18839,7 @@
                 <a:srgbClr val="DC5F46"/>
               </a:solidFill>
               <a:latin typeface="Georgia" panose="02040502050405020303" pitchFamily="18" charset="0"/>
+              <a:ea typeface="Batang"/>
             </a:endParaRPr>
           </a:p>
         </p:txBody>
@@ -18951,6 +19010,7 @@
                   <a:srgbClr val="171A1F"/>
                 </a:solidFill>
                 <a:latin typeface="Georgia" panose="02040502050405020303" pitchFamily="18" charset="0"/>
+                <a:ea typeface="Batang"/>
               </a:rPr>
               <a:t>Two paths. One obvious choice.</a:t>
             </a:r>
@@ -18959,6 +19019,7 @@
                 <a:srgbClr val="171A1F"/>
               </a:solidFill>
               <a:latin typeface="Georgia" panose="02040502050405020303" pitchFamily="18" charset="0"/>
+              <a:ea typeface="Batang"/>
             </a:endParaRPr>
           </a:p>
         </p:txBody>
@@ -19051,6 +19112,7 @@
                   <a:srgbClr val="171A1F"/>
                 </a:solidFill>
                 <a:latin typeface="Georgia" panose="02040502050405020303" pitchFamily="18" charset="0"/>
+                <a:ea typeface="Batang"/>
               </a:rPr>
               <a:t>Before</a:t>
             </a:r>
@@ -19059,6 +19121,7 @@
                 <a:srgbClr val="171A1F"/>
               </a:solidFill>
               <a:latin typeface="Georgia" panose="02040502050405020303" pitchFamily="18" charset="0"/>
+              <a:ea typeface="Batang"/>
             </a:endParaRPr>
           </a:p>
         </p:txBody>
@@ -19197,6 +19260,7 @@
                   <a:srgbClr val="FFFFFF"/>
                 </a:solidFill>
                 <a:latin typeface="Georgia" panose="02040502050405020303" pitchFamily="18" charset="0"/>
+                <a:ea typeface="Batang"/>
               </a:rPr>
               <a:t>Now</a:t>
             </a:r>
@@ -19205,6 +19269,7 @@
                 <a:srgbClr val="FFFFFF"/>
               </a:solidFill>
               <a:latin typeface="Georgia" panose="02040502050405020303" pitchFamily="18" charset="0"/>
+              <a:ea typeface="Batang"/>
             </a:endParaRPr>
           </a:p>
         </p:txBody>
@@ -19327,6 +19392,7 @@
                   <a:srgbClr val="171A1F"/>
                 </a:solidFill>
                 <a:latin typeface="Georgia" panose="02040502050405020303" pitchFamily="18" charset="0"/>
+                <a:ea typeface="Batang"/>
               </a:rPr>
               <a:t>Decision velocity improves when the system does the busywork.</a:t>
             </a:r>
@@ -19335,6 +19401,7 @@
                 <a:srgbClr val="171A1F"/>
               </a:solidFill>
               <a:latin typeface="Georgia" panose="02040502050405020303" pitchFamily="18" charset="0"/>
+              <a:ea typeface="Batang"/>
             </a:endParaRPr>
           </a:p>
         </p:txBody>
@@ -19419,6 +19486,7 @@
                   <a:srgbClr val="C7422F"/>
                 </a:solidFill>
                 <a:latin typeface="Georgia" panose="02040502050405020303" pitchFamily="18" charset="0"/>
+                <a:ea typeface="Batang"/>
               </a:rPr>
               <a:t>TIME TO DECISION</a:t>
             </a:r>
@@ -19427,6 +19495,7 @@
                 <a:srgbClr val="C7422F"/>
               </a:solidFill>
               <a:latin typeface="Georgia" panose="02040502050405020303" pitchFamily="18" charset="0"/>
+              <a:ea typeface="Batang"/>
             </a:endParaRPr>
           </a:p>
         </p:txBody>
@@ -19623,6 +19692,7 @@
                   <a:srgbClr val="171A1F"/>
                 </a:solidFill>
                 <a:latin typeface="Georgia" panose="02040502050405020303" pitchFamily="18" charset="0"/>
+                <a:ea typeface="Batang"/>
               </a:rPr>
               <a:t>A complete story, not a collection of decorated pages.</a:t>
             </a:r>
@@ -19631,6 +19701,7 @@
                 <a:srgbClr val="171A1F"/>
               </a:solidFill>
               <a:latin typeface="Georgia" panose="02040502050405020303" pitchFamily="18" charset="0"/>
+              <a:ea typeface="Batang"/>
             </a:endParaRPr>
           </a:p>
         </p:txBody>
@@ -19669,6 +19740,7 @@
                   <a:srgbClr val="C7422F"/>
                 </a:solidFill>
                 <a:latin typeface="Georgia" panose="02040502050405020303" pitchFamily="18" charset="0"/>
+                <a:ea typeface="Batang"/>
               </a:rPr>
               <a:t>18</a:t>
             </a:r>
@@ -19677,6 +19749,7 @@
                 <a:srgbClr val="C7422F"/>
               </a:solidFill>
               <a:latin typeface="Georgia" panose="02040502050405020303" pitchFamily="18" charset="0"/>
+              <a:ea typeface="Batang"/>
             </a:endParaRPr>
           </a:p>
         </p:txBody>
@@ -19761,6 +19834,7 @@
                   <a:srgbClr val="254E70"/>
                 </a:solidFill>
                 <a:latin typeface="Georgia" panose="02040502050405020303" pitchFamily="18" charset="0"/>
+                <a:ea typeface="Batang"/>
               </a:rPr>
               <a:t>5</a:t>
             </a:r>
@@ -19769,6 +19843,7 @@
                 <a:srgbClr val="254E70"/>
               </a:solidFill>
               <a:latin typeface="Georgia" panose="02040502050405020303" pitchFamily="18" charset="0"/>
+              <a:ea typeface="Batang"/>
             </a:endParaRPr>
           </a:p>
         </p:txBody>
@@ -19853,6 +19928,7 @@
                   <a:srgbClr val="6B7D6A"/>
                 </a:solidFill>
                 <a:latin typeface="Georgia" panose="02040502050405020303" pitchFamily="18" charset="0"/>
+                <a:ea typeface="Batang"/>
               </a:rPr>
               <a:t>0</a:t>
             </a:r>
@@ -19861,6 +19937,7 @@
                 <a:srgbClr val="6B7D6A"/>
               </a:solidFill>
               <a:latin typeface="Georgia" panose="02040502050405020303" pitchFamily="18" charset="0"/>
+              <a:ea typeface="Batang"/>
             </a:endParaRPr>
           </a:p>
         </p:txBody>
@@ -19983,6 +20060,7 @@
                   <a:srgbClr val="171A1F"/>
                 </a:solidFill>
                 <a:latin typeface="Georgia" panose="02040502050405020303" pitchFamily="18" charset="0"/>
+                <a:ea typeface="Batang"/>
               </a:rPr>
               <a:t>A roadmap that compounds instead of resets.</a:t>
             </a:r>
@@ -19991,6 +20069,7 @@
                 <a:srgbClr val="171A1F"/>
               </a:solidFill>
               <a:latin typeface="Georgia" panose="02040502050405020303" pitchFamily="18" charset="0"/>
+              <a:ea typeface="Batang"/>
             </a:endParaRPr>
           </a:p>
         </p:txBody>
@@ -20083,6 +20162,7 @@
                   <a:srgbClr val="C7422F"/>
                 </a:solidFill>
                 <a:latin typeface="Georgia" panose="02040502050405020303" pitchFamily="18" charset="0"/>
+                <a:ea typeface="Batang"/>
               </a:rPr>
               <a:t>01</a:t>
             </a:r>
@@ -20091,6 +20171,7 @@
                 <a:srgbClr val="C7422F"/>
               </a:solidFill>
               <a:latin typeface="Georgia" panose="02040502050405020303" pitchFamily="18" charset="0"/>
+              <a:ea typeface="Batang"/>
             </a:endParaRPr>
           </a:p>
         </p:txBody>
@@ -20175,6 +20256,7 @@
                   <a:srgbClr val="254E70"/>
                 </a:solidFill>
                 <a:latin typeface="Georgia" panose="02040502050405020303" pitchFamily="18" charset="0"/>
+                <a:ea typeface="Batang"/>
               </a:rPr>
               <a:t>02</a:t>
             </a:r>
@@ -20183,6 +20265,7 @@
                 <a:srgbClr val="254E70"/>
               </a:solidFill>
               <a:latin typeface="Georgia" panose="02040502050405020303" pitchFamily="18" charset="0"/>
+              <a:ea typeface="Batang"/>
             </a:endParaRPr>
           </a:p>
         </p:txBody>
@@ -20267,6 +20350,7 @@
                   <a:srgbClr val="6B7D6A"/>
                 </a:solidFill>
                 <a:latin typeface="Georgia" panose="02040502050405020303" pitchFamily="18" charset="0"/>
+                <a:ea typeface="Batang"/>
               </a:rPr>
               <a:t>03</a:t>
             </a:r>
@@ -20275,6 +20359,7 @@
                 <a:srgbClr val="6B7D6A"/>
               </a:solidFill>
               <a:latin typeface="Georgia" panose="02040502050405020303" pitchFamily="18" charset="0"/>
+              <a:ea typeface="Batang"/>
             </a:endParaRPr>
           </a:p>
         </p:txBody>
@@ -20359,6 +20444,7 @@
                   <a:srgbClr val="171A1F"/>
                 </a:solidFill>
                 <a:latin typeface="Georgia" panose="02040502050405020303" pitchFamily="18" charset="0"/>
+                <a:ea typeface="Batang"/>
               </a:rPr>
               <a:t>04</a:t>
             </a:r>
@@ -20367,6 +20453,7 @@
                 <a:srgbClr val="171A1F"/>
               </a:solidFill>
               <a:latin typeface="Georgia" panose="02040502050405020303" pitchFamily="18" charset="0"/>
+              <a:ea typeface="Batang"/>
             </a:endParaRPr>
           </a:p>
         </p:txBody>
@@ -20535,6 +20622,7 @@
                   <a:srgbClr val="171A1F"/>
                 </a:solidFill>
                 <a:latin typeface="Georgia" panose="02040502050405020303" pitchFamily="18" charset="0"/>
+                <a:ea typeface="Batang"/>
               </a:rPr>
               <a:t>Template-first changes the economics of quality.</a:t>
             </a:r>
@@ -20543,6 +20631,7 @@
                 <a:srgbClr val="171A1F"/>
               </a:solidFill>
               <a:latin typeface="Georgia" panose="02040502050405020303" pitchFamily="18" charset="0"/>
+              <a:ea typeface="Batang"/>
             </a:endParaRPr>
           </a:p>
         </p:txBody>
@@ -20782,6 +20871,7 @@
                   <a:srgbClr val="FFFFFF"/>
                 </a:solidFill>
                 <a:latin typeface="Georgia" panose="02040502050405020303" pitchFamily="18" charset="0"/>
+                <a:ea typeface="Batang"/>
               </a:rPr>
               <a:t>VS</a:t>
             </a:r>
@@ -20790,6 +20880,7 @@
                 <a:srgbClr val="FFFFFF"/>
               </a:solidFill>
               <a:latin typeface="Georgia" panose="02040502050405020303" pitchFamily="18" charset="0"/>
+              <a:ea typeface="Batang"/>
             </a:endParaRPr>
           </a:p>
         </p:txBody>
